--- a/assets/pptx/catalog-489.pptx
+++ b/assets/pptx/catalog-489.pptx
@@ -3373,7 +3373,7 @@
                 <a:ea typeface="Ebrima"/>
                 <a:cs typeface="Ebrima"/>
               </a:rPr>
-              <a:t>አመታት አመታት አንተን አይለውጡህም (2x)</a:t>
+              <a:t>አመታት አመታት አንተን አይለውጡህም 2x</a:t>
             </a:r>
           </a:p>
           <a:p>
@@ -3391,7 +3391,7 @@
                 <a:ea typeface="Ebrima"/>
                 <a:cs typeface="Ebrima"/>
               </a:rPr>
-              <a:t>ዘመናት ዘመናት አንተን አይለውጡህም (2x)</a:t>
+              <a:t>ዘመናት ዘመናት አንተን አይለውጡህም 2x</a:t>
             </a:r>
           </a:p>
         </p:txBody>
@@ -3494,7 +3494,7 @@
                 <a:ea typeface="Ebrima"/>
                 <a:cs typeface="Ebrima"/>
               </a:rPr>
-              <a:t>በዙፋንህ ላይ ጌታ ትኖራለህ (4x)</a:t>
+              <a:t>በዙፋንህ ላይ ጌታ ትኖራለህ 4x</a:t>
             </a:r>
           </a:p>
         </p:txBody>
@@ -3682,7 +3682,7 @@
                 <a:ea typeface="Ebrima"/>
                 <a:cs typeface="Ebrima"/>
               </a:rPr>
-              <a:t>አመታት አመታት አንተን አይለውጡህም (2x)</a:t>
+              <a:t>አመታት አመታት አንተን አይለውጡህም 2x</a:t>
             </a:r>
           </a:p>
           <a:p>
@@ -3700,7 +3700,7 @@
                 <a:ea typeface="Ebrima"/>
                 <a:cs typeface="Ebrima"/>
               </a:rPr>
-              <a:t>ዘመናት ዘመናት አንተን አይለውጡህም (2x)</a:t>
+              <a:t>ዘመናት ዘመናት አንተን አይለውጡህም 2x</a:t>
             </a:r>
           </a:p>
         </p:txBody>
@@ -4081,7 +4081,7 @@
                 <a:ea typeface="Ebrima"/>
                 <a:cs typeface="Ebrima"/>
               </a:rPr>
-              <a:t>አመታት አመታት አንተን አይለውጡህም (2x)</a:t>
+              <a:t>አመታት አመታት አንተን አይለውጡህም 2x</a:t>
             </a:r>
           </a:p>
           <a:p>
@@ -4099,7 +4099,7 @@
                 <a:ea typeface="Ebrima"/>
                 <a:cs typeface="Ebrima"/>
               </a:rPr>
-              <a:t>ዘመናት ዘመናት አንተን አይለውጡህም (2x)</a:t>
+              <a:t>ዘመናት ዘመናት አንተን አይለውጡህም 2x</a:t>
             </a:r>
           </a:p>
         </p:txBody>
@@ -4480,7 +4480,7 @@
                 <a:ea typeface="Ebrima"/>
                 <a:cs typeface="Ebrima"/>
               </a:rPr>
-              <a:t>አመታት አመታት አንተን አይለውጡህም (2x)</a:t>
+              <a:t>አመታት አመታት አንተን አይለውጡህም 2x</a:t>
             </a:r>
           </a:p>
           <a:p>
@@ -4498,7 +4498,7 @@
                 <a:ea typeface="Ebrima"/>
                 <a:cs typeface="Ebrima"/>
               </a:rPr>
-              <a:t>ዘመናት ዘመናት አንተን አይለውጡህም (2x)</a:t>
+              <a:t>ዘመናት ዘመናት አንተን አይለውጡህም 2x</a:t>
             </a:r>
           </a:p>
         </p:txBody>
